--- a/8. 과거차 이력/고객사 제출/HKMC_과거차_문제점_250714.pptx
+++ b/8. 과거차 이력/고객사 제출/HKMC_과거차_문제점_250714.pptx
@@ -234,7 +234,7 @@
           <a:p>
             <a:fld id="{0F9C7889-A84F-49D1-BD5A-0C9403740ED6}" type="datetimeFigureOut">
               <a:rPr lang="ko-KR" altLang="en-US" smtClean="0"/>
-              <a:t>2025-07-14</a:t>
+              <a:t>2026-04-14</a:t>
             </a:fld>
             <a:endParaRPr lang="ko-KR" altLang="en-US" dirty="0"/>
           </a:p>
@@ -400,7 +400,7 @@
           <a:p>
             <a:fld id="{95102FC6-FE94-47A7-84EE-A54FBD2777CB}" type="datetimeFigureOut">
               <a:rPr lang="ko-KR" altLang="en-US" smtClean="0"/>
-              <a:t>2025-07-14</a:t>
+              <a:t>2026-04-14</a:t>
             </a:fld>
             <a:endParaRPr lang="ko-KR" altLang="en-US" dirty="0"/>
           </a:p>
@@ -3392,26 +3392,16 @@
               <a:t>▣ 과거차 문제점 </a:t>
             </a:r>
             <a:r>
-              <a:rPr lang="en-US" altLang="ko-KR" sz="1200" b="1" smtClean="0">
-                <a:latin typeface="+mn-ea"/>
-                <a:cs typeface="Arial" panose="020B0604020202020204" pitchFamily="34" charset="0"/>
-              </a:rPr>
-              <a:t>( S/W</a:t>
-            </a:r>
-            <a:r>
-              <a:rPr lang="ko-KR" altLang="en-US" sz="1200" b="1" dirty="0" smtClean="0">
-                <a:latin typeface="+mn-ea"/>
-                <a:cs typeface="Arial" panose="020B0604020202020204" pitchFamily="34" charset="0"/>
-              </a:rPr>
-              <a:t> </a:t>
-            </a:r>
-            <a:r>
               <a:rPr lang="en-US" altLang="ko-KR" sz="1200" b="1" dirty="0" smtClean="0">
                 <a:latin typeface="+mn-ea"/>
                 <a:cs typeface="Arial" panose="020B0604020202020204" pitchFamily="34" charset="0"/>
               </a:rPr>
-              <a:t>)</a:t>
+              <a:t>(S/W)</a:t>
             </a:r>
+            <a:endParaRPr lang="en-US" altLang="ko-KR" sz="1200" b="1" dirty="0" smtClean="0">
+              <a:latin typeface="+mn-ea"/>
+              <a:cs typeface="Arial" panose="020B0604020202020204" pitchFamily="34" charset="0"/>
+            </a:endParaRPr>
           </a:p>
         </p:txBody>
       </p:sp>
@@ -3423,8 +3413,8 @@
         </p:nvSpPr>
         <p:spPr>
           <a:xfrm>
-            <a:off x="179512" y="890249"/>
-            <a:ext cx="8964488" cy="5602842"/>
+            <a:off x="84078" y="890249"/>
+            <a:ext cx="8969196" cy="4987023"/>
           </a:xfrm>
           <a:prstGeom prst="rect">
             <a:avLst/>
@@ -9395,7 +9385,7 @@
           <p:nvPr>
             <p:extLst>
               <p:ext uri="{D42A27DB-BD31-4B8C-83A1-F6EECF244321}">
-                <p14:modId xmlns:p14="http://schemas.microsoft.com/office/powerpoint/2010/main" val="2899349104"/>
+                <p14:modId xmlns:p14="http://schemas.microsoft.com/office/powerpoint/2010/main" val="278895435"/>
               </p:ext>
             </p:extLst>
           </p:nvPr>
@@ -9408,7 +9398,7 @@
           <a:graphicData uri="http://schemas.openxmlformats.org/presentationml/2006/ole">
             <mc:AlternateContent xmlns:mc="http://schemas.openxmlformats.org/markup-compatibility/2006">
               <mc:Choice xmlns:v="urn:schemas-microsoft-com:vml" Requires="v">
-                <p:oleObj spid="_x0000_s1080" name="프레젠테이션" showAsIcon="1" r:id="rId3" imgW="380880" imgH="771480" progId="PowerPoint.Show.12">
+                <p:oleObj spid="_x0000_s1086" name="프레젠테이션" showAsIcon="1" r:id="rId3" imgW="380880" imgH="771480" progId="PowerPoint.Show.12">
                   <p:embed/>
                 </p:oleObj>
               </mc:Choice>
@@ -9456,20 +9446,20 @@
           <p:nvPr>
             <p:extLst>
               <p:ext uri="{D42A27DB-BD31-4B8C-83A1-F6EECF244321}">
-                <p14:modId xmlns:p14="http://schemas.microsoft.com/office/powerpoint/2010/main" val="3628347936"/>
+                <p14:modId xmlns:p14="http://schemas.microsoft.com/office/powerpoint/2010/main" val="3764746909"/>
               </p:ext>
             </p:extLst>
           </p:nvPr>
         </p:nvGraphicFramePr>
         <p:xfrm>
-          <a:off x="8661400" y="1803400"/>
-          <a:ext cx="303213" cy="596900"/>
+          <a:off x="8662988" y="1803400"/>
+          <a:ext cx="301625" cy="596900"/>
         </p:xfrm>
         <a:graphic>
           <a:graphicData uri="http://schemas.openxmlformats.org/presentationml/2006/ole">
             <mc:AlternateContent xmlns:mc="http://schemas.openxmlformats.org/markup-compatibility/2006">
               <mc:Choice xmlns:v="urn:schemas-microsoft-com:vml" Requires="v">
-                <p:oleObj spid="_x0000_s1081" name="프레젠테이션" showAsIcon="1" r:id="rId5" imgW="380880" imgH="771480" progId="PowerPoint.Show.12">
+                <p:oleObj spid="_x0000_s1087" name="프레젠테이션" showAsIcon="1" r:id="rId5" imgW="380880" imgH="771480" progId="PowerPoint.Show.12">
                   <p:embed/>
                 </p:oleObj>
               </mc:Choice>
@@ -9492,8 +9482,8 @@
                     </p:blipFill>
                     <p:spPr>
                       <a:xfrm>
-                        <a:off x="8661400" y="1803400"/>
-                        <a:ext cx="303213" cy="596900"/>
+                        <a:off x="8662988" y="1803400"/>
+                        <a:ext cx="301625" cy="596900"/>
                       </a:xfrm>
                       <a:prstGeom prst="rect">
                         <a:avLst/>
